--- a/assets/mind-mapping-your-pedagogy.pptx
+++ b/assets/mind-mapping-your-pedagogy.pptx
@@ -12391,10 +12391,10 @@
               <a:buChar char="●"/>
             </a:pPr>
             <a:r>
-              <a:rPr lang="en" sz="1600"/>
+              <a:rPr lang="en" sz="1600" dirty="0"/>
               <a:t>For example, on my mind map I circled:</a:t>
             </a:r>
-            <a:endParaRPr sz="1600"/>
+            <a:endParaRPr sz="1600" dirty="0"/>
           </a:p>
           <a:p>
             <a:pPr marL="914400" lvl="1" indent="-330200" algn="l" rtl="0">
@@ -12408,10 +12408,10 @@
               <a:buChar char="○"/>
             </a:pPr>
             <a:r>
-              <a:rPr lang="en" sz="1600"/>
+              <a:rPr lang="en" sz="1600" dirty="0"/>
               <a:t>Critical thinking</a:t>
             </a:r>
-            <a:endParaRPr sz="1600"/>
+            <a:endParaRPr sz="1600" dirty="0"/>
           </a:p>
           <a:p>
             <a:pPr marL="914400" lvl="1" indent="-330200" algn="l" rtl="0">
@@ -12425,10 +12425,10 @@
               <a:buChar char="○"/>
             </a:pPr>
             <a:r>
-              <a:rPr lang="en" sz="1600"/>
-              <a:t>Questions</a:t>
-            </a:r>
-            <a:endParaRPr sz="1600"/>
+              <a:rPr lang="en" sz="1600" dirty="0"/>
+              <a:t>Confidence</a:t>
+            </a:r>
+            <a:endParaRPr sz="1600" dirty="0"/>
           </a:p>
           <a:p>
             <a:pPr marL="914400" lvl="1" indent="-330200" algn="l" rtl="0">
@@ -12442,10 +12442,10 @@
               <a:buChar char="○"/>
             </a:pPr>
             <a:r>
-              <a:rPr lang="en" sz="1600"/>
+              <a:rPr lang="en" sz="1600" dirty="0"/>
               <a:t>Owning technology</a:t>
             </a:r>
-            <a:endParaRPr sz="1600"/>
+            <a:endParaRPr sz="1600" dirty="0"/>
           </a:p>
           <a:p>
             <a:pPr marL="914400" lvl="1" indent="-330200" algn="l" rtl="0">
@@ -12459,10 +12459,10 @@
               <a:buChar char="○"/>
             </a:pPr>
             <a:r>
-              <a:rPr lang="en" sz="1600"/>
+              <a:rPr lang="en" sz="1600" dirty="0"/>
               <a:t>Hands-on activities</a:t>
             </a:r>
-            <a:endParaRPr sz="1600"/>
+            <a:endParaRPr sz="1600" dirty="0"/>
           </a:p>
           <a:p>
             <a:pPr marL="457200" lvl="0" indent="-330200" algn="l" rtl="0">
@@ -12476,10 +12476,10 @@
               <a:buChar char="●"/>
             </a:pPr>
             <a:r>
-              <a:rPr lang="en" sz="1600"/>
+              <a:rPr lang="en" sz="1600" dirty="0"/>
               <a:t>“Beyond Buttonology: Digital Humanities, Digital Pedagogy, and the ACRL Framework” - John E. Russell and Merinda Kaye Hensley</a:t>
             </a:r>
-            <a:endParaRPr sz="1600"/>
+            <a:endParaRPr sz="1600" dirty="0"/>
           </a:p>
         </p:txBody>
       </p:sp>
